--- a/output/week13/Week13_Presentation_BICT3202_OOAD.pptx
+++ b/output/week13/Week13_Presentation_BICT3202_OOAD.pptx
@@ -7865,7 +7865,7 @@
                 </a:solidFill>
                 <a:latin typeface="Open Sans"/>
               </a:rPr>
-              <a:t>Presentation → Application → Domain → Infrastructure — not everything ↔ everything.</a:t>
+              <a:t>Presentation -&gt; Application -&gt; Domain -&gt; Infrastructure — not everything &lt;- everything.</a:t>
             </a:r>
           </a:p>
         </p:txBody>
@@ -13170,7 +13170,7 @@
                 </a:solidFill>
                 <a:latin typeface="Open Sans"/>
               </a:rPr>
-              <a:t>Presentation → Application → Domain → Data Access → Database.</a:t>
+              <a:t>Presentation -&gt; Application -&gt; Domain -&gt; Data Access -&gt; Database.</a:t>
             </a:r>
           </a:p>
         </p:txBody>
@@ -14122,7 +14122,7 @@
                 </a:solidFill>
                 <a:latin typeface="Open Sans"/>
               </a:rPr>
-              <a:t>max 6 → max 8 courses: centralised = one change; duplicated = four changes.</a:t>
+              <a:t>max 6 -&gt; max 8 courses: centralised = one change; duplicated = four changes.</a:t>
             </a:r>
           </a:p>
         </p:txBody>
